--- a/assets/pptx/catalog-482.pptx
+++ b/assets/pptx/catalog-482.pptx
@@ -3377,7 +3377,7 @@
                 <a:ea typeface="Ebrima"/>
                 <a:cs typeface="Ebrima"/>
               </a:rPr>
-              <a:t>የለመንኩት እና ከዚያም በላይ ካልኩት በላይ ይሰጠኛል (2×)</a:t>
+              <a:t>የለመንኩት እና ከዚያም በላይ ካልኩት በላይ ይሰጠኛል 2×</a:t>
             </a:r>
           </a:p>
         </p:txBody>
@@ -3892,7 +3892,7 @@
                 <a:ea typeface="Ebrima"/>
                 <a:cs typeface="Ebrima"/>
               </a:rPr>
-              <a:t>አንተ ግን ሳትቸኩል ቀስ ብለህ ረጋ ብለህ አሳየኸው (2×)</a:t>
+              <a:t>አንተ ግን ሳትቸኩል ቀስ ብለህ ረጋ ብለህ አሳየኸው 2×</a:t>
             </a:r>
           </a:p>
         </p:txBody>
@@ -4582,7 +4582,7 @@
                 <a:ea typeface="Ebrima"/>
                 <a:cs typeface="Ebrima"/>
               </a:rPr>
-              <a:t>ኧረ የለም የለም የከሰረ ወይ ያፈረ አላየሁም (2×)</a:t>
+              <a:t>ኧረ የለም የለም የከሰረ ወይ ያፈረ አላየሁም 2×</a:t>
             </a:r>
           </a:p>
         </p:txBody>
